--- a/figures/AGT_Tanking_Deck.pptx
+++ b/figures/AGT_Tanking_Deck.pptx
@@ -11774,7 +11774,7 @@
                 </a:solidFill>
                 <a:latin typeface="Calibri"/>
               </a:rPr>
-              <a:t>LLM agents (10 seasons)</a:t>
+              <a:t>LLM agents (25 seasons)</a:t>
             </a:r>
           </a:p>
         </p:txBody>
@@ -11850,7 +11850,8 @@
                 </a:solidFill>
                 <a:latin typeface="Calibri"/>
               </a:rPr>
-              <a:t>All 30 = Claude Haiku</a:t>
+              <a:t>All 30 = Claude Haiku
+5 mechanisms</a:t>
             </a:r>
           </a:p>
         </p:txBody>
@@ -11926,7 +11927,7 @@
                 </a:solidFill>
                 <a:latin typeface="Calibri"/>
               </a:rPr>
-              <a:t>Do LLMs spontaneously discover the tanking incentive?</a:t>
+              <a:t>Do LLMs discover mechanism-specific tanking strategies?</a:t>
             </a:r>
           </a:p>
         </p:txBody>
@@ -12600,7 +12601,7 @@
                 </a:solidFill>
                 <a:latin typeface="Calibri"/>
               </a:rPr>
-              <a:t>▸ Limitation: expensive (10 seasons of 30 teams × 8 decisions)</a:t>
+              <a:t>▸ Limitation: expensive (25 seasons of 30 teams × ~7 decisions)</a:t>
             </a:r>
           </a:p>
         </p:txBody>
@@ -15135,7 +15136,7 @@
                 </a:solidFill>
                 <a:latin typeface="Calibri"/>
               </a:rPr>
-              <a:t>Result 5: LLM Agents  (Claude Haiku-4-5, 10 seasons)</a:t>
+              <a:t>Result 5: LLM Agents  (25 seasons, all 5 mechanisms)</a:t>
             </a:r>
           </a:p>
         </p:txBody>
@@ -15168,7 +15169,7 @@
                 </a:solidFill>
                 <a:latin typeface="Calibri"/>
               </a:rPr>
-              <a:t>Does the tanking incentive emerge spontaneously from language model reasoning?</a:t>
+              <a:t>LLM tanking is mechanism-dependent — range 0% to 8% across designs</a:t>
             </a:r>
           </a:p>
         </p:txBody>
@@ -15181,8 +15182,8 @@
         </p:nvSpPr>
         <p:spPr>
           <a:xfrm>
-            <a:off x="5606917" y="960120"/>
-            <a:ext cx="6582034" cy="5897880"/>
+            <a:off x="6338255" y="960120"/>
+            <a:ext cx="5850696" cy="5897880"/>
           </a:xfrm>
           <a:prstGeom prst="rect">
             <a:avLst/>
@@ -15218,7 +15219,7 @@
       </p:sp>
       <p:pic>
         <p:nvPicPr>
-          <p:cNvPr id="7" name="Picture 6" descr="fig_llm_comparison.png"/>
+          <p:cNvPr id="7" name="Picture 6" descr="fig8_rational_vs_llm_by_mechanism.png"/>
           <p:cNvPicPr>
             <a:picLocks noChangeAspect="1"/>
           </p:cNvPicPr>
@@ -15233,7 +15234,7 @@
         <p:spPr>
           <a:xfrm>
             <a:off x="109728" y="1069848"/>
-            <a:ext cx="5387461" cy="5678424"/>
+            <a:ext cx="6118799" cy="5678424"/>
           </a:xfrm>
           <a:prstGeom prst="rect">
             <a:avLst/>
@@ -15248,8 +15249,8 @@
         </p:nvSpPr>
         <p:spPr>
           <a:xfrm>
-            <a:off x="5835517" y="1234440"/>
-            <a:ext cx="6216274" cy="5532120"/>
+            <a:off x="6566855" y="1234440"/>
+            <a:ext cx="5484936" cy="5532120"/>
           </a:xfrm>
           <a:prstGeom prst="rect">
             <a:avLst/>
@@ -15274,7 +15275,7 @@
                 </a:solidFill>
                 <a:latin typeface="Calibri"/>
               </a:rPr>
-              <a:t>▸ LLM: 13.2%  vs.  Rational: 6.9%  (≈ 2×)</a:t>
+              <a:t>▸ LLM tanking rate by mechanism:</a:t>
             </a:r>
           </a:p>
           <a:p>
@@ -15290,13 +15291,13 @@
               </a:spcBef>
             </a:pPr>
             <a:r>
-              <a:rPr sz="1700" b="1">
+              <a:rPr sz="1700" b="0">
                 <a:solidFill>
                   <a:srgbClr val="1A1A2E"/>
                 </a:solidFill>
                 <a:latin typeface="Calibri"/>
               </a:rPr>
-              <a:t>▸ LLM reasoning patterns:</a:t>
+              <a:t>▸ COLA:           0.0%  ← full IC; LLM understands</a:t>
             </a:r>
           </a:p>
           <a:p>
@@ -15312,45 +15313,7 @@
                 </a:solidFill>
                 <a:latin typeface="Calibri"/>
               </a:rPr>
-              <a:t>▸ "At 8-22, playoff probability is negligible (&lt;5%),</a:t>
-            </a:r>
-          </a:p>
-          <a:p>
-            <a:pPr>
-              <a:spcBef>
-                <a:spcPts val="200"/>
-              </a:spcBef>
-            </a:pPr>
-            <a:r>
-              <a:rPr sz="1500" b="0">
-                <a:solidFill>
-                  <a:srgbClr val="555555"/>
-                </a:solidFill>
-                <a:latin typeface="Calibri"/>
-              </a:rPr>
-              <a:t>  – lottery upside exceeds any realistic playoff path"</a:t>
-            </a:r>
-          </a:p>
-          <a:p>
-            <a:pPr>
-              <a:spcBef>
-                <a:spcPts val="200"/>
-              </a:spcBef>
-            </a:pPr>
-            <a:r>
-              <a:rPr sz="1500" b="0">
-                <a:solidFill>
-                  <a:srgbClr val="555555"/>
-                </a:solidFill>
-                <a:latin typeface="Calibri"/>
-              </a:rPr>
-              <a:t>  – → effort = 0.0  (tanking)</a:t>
-            </a:r>
-          </a:p>
-          <a:p>
-            <a:r>
-              <a:rPr sz="800"/>
-              <a:t> </a:t>
+              <a:t>▸ NBA 3-2-1:     ~0.0%  ← inverted incentive recognized</a:t>
             </a:r>
           </a:p>
           <a:p>
@@ -15366,45 +15329,7 @@
                 </a:solidFill>
                 <a:latin typeface="Calibri"/>
               </a:rPr>
-              <a:t>▸ "playoff probability is high and 200-pt bonus vastly</a:t>
-            </a:r>
-          </a:p>
-          <a:p>
-            <a:pPr>
-              <a:spcBef>
-                <a:spcPts val="200"/>
-              </a:spcBef>
-            </a:pPr>
-            <a:r>
-              <a:rPr sz="1500" b="0">
-                <a:solidFill>
-                  <a:srgbClr val="555555"/>
-                </a:solidFill>
-                <a:latin typeface="Calibri"/>
-              </a:rPr>
-              <a:t>  – exceeds any lottery pick expected value; compete"</a:t>
-            </a:r>
-          </a:p>
-          <a:p>
-            <a:pPr>
-              <a:spcBef>
-                <a:spcPts val="200"/>
-              </a:spcBef>
-            </a:pPr>
-            <a:r>
-              <a:rPr sz="1500" b="0">
-                <a:solidFill>
-                  <a:srgbClr val="555555"/>
-                </a:solidFill>
-                <a:latin typeface="Calibri"/>
-              </a:rPr>
-              <a:t>  – → effort = 1.0  (competing)</a:t>
-            </a:r>
-          </a:p>
-          <a:p>
-            <a:r>
-              <a:rPr sz="800"/>
-              <a:t> </a:t>
+              <a:t>▸ Weighted loss:  3.4%  ← decay understood; some early-season</a:t>
             </a:r>
           </a:p>
           <a:p>
@@ -15414,13 +15339,13 @@
               </a:spcBef>
             </a:pPr>
             <a:r>
-              <a:rPr sz="1700" b="1">
+              <a:rPr sz="1700" b="0">
                 <a:solidFill>
                   <a:srgbClr val="1A1A2E"/>
                 </a:solidFill>
                 <a:latin typeface="Calibri"/>
               </a:rPr>
-              <a:t>▸ Why LLMs tank more than rational agents:</a:t>
+              <a:t>▸ Bilevel:        6.2%  ← mid-season lock effect visible</a:t>
             </a:r>
           </a:p>
           <a:p>
@@ -15436,7 +15361,13 @@
                 </a:solidFill>
                 <a:latin typeface="Calibri"/>
               </a:rPr>
-              <a:t>▸ Qualitative elimination heuristics are sharper than</a:t>
+              <a:t>▸ NBA lottery:    8.0%  ← highest; behavioral elimination heuristic</a:t>
+            </a:r>
+          </a:p>
+          <a:p>
+            <a:r>
+              <a:rPr sz="800"/>
+              <a:t> </a:t>
             </a:r>
           </a:p>
           <a:p>
@@ -15446,13 +15377,13 @@
               </a:spcBef>
             </a:pPr>
             <a:r>
-              <a:rPr sz="1700" b="0">
+              <a:rPr sz="1700" b="1">
                 <a:solidFill>
                   <a:srgbClr val="1A1A2E"/>
                 </a:solidFill>
                 <a:latin typeface="Calibri"/>
               </a:rPr>
-              <a:t>▸ continuous probability-weighted EU calculation</a:t>
+              <a:t>▸ Two types of LLM tanking:</a:t>
             </a:r>
           </a:p>
           <a:p>
@@ -15468,7 +15399,7 @@
                 </a:solidFill>
                 <a:latin typeface="Calibri"/>
               </a:rPr>
-              <a:t>▸ LLMs apply a binary 'out of contention' threshold;</a:t>
+              <a:t>▸ Type 1: lottery-driven (requires mechanism incentive)</a:t>
             </a:r>
           </a:p>
           <a:p>
@@ -15484,13 +15415,7 @@
                 </a:solidFill>
                 <a:latin typeface="Calibri"/>
               </a:rPr>
-              <a:t>▸ rational agents use a gradient</a:t>
-            </a:r>
-          </a:p>
-          <a:p>
-            <a:r>
-              <a:rPr sz="800"/>
-              <a:t> </a:t>
+              <a:t>▸ Type 2: post-elimination effort drop (mechanism-independent)</a:t>
             </a:r>
           </a:p>
           <a:p>
@@ -15506,7 +15431,13 @@
                 </a:solidFill>
                 <a:latin typeface="Calibri"/>
               </a:rPr>
-              <a:t>▸ Behavioral finding: real GMs (qualitative reasoners)</a:t>
+              <a:t>▸ LLMs mostly show Type 2: 'playoff odds negligible → reduce effort'</a:t>
+            </a:r>
+          </a:p>
+          <a:p>
+            <a:r>
+              <a:rPr sz="800"/>
+              <a:t> </a:t>
             </a:r>
           </a:p>
           <a:p>
@@ -15516,13 +15447,61 @@
               </a:spcBef>
             </a:pPr>
             <a:r>
+              <a:rPr sz="1700" b="1">
+                <a:solidFill>
+                  <a:srgbClr val="1A1A2E"/>
+                </a:solidFill>
+                <a:latin typeface="Calibri"/>
+              </a:rPr>
+              <a:t>▸ Draft class caveat:</a:t>
+            </a:r>
+          </a:p>
+          <a:p>
+            <a:pPr>
+              <a:spcBef>
+                <a:spcPts val="800"/>
+              </a:spcBef>
+            </a:pPr>
+            <a:r>
               <a:rPr sz="1700" b="0">
                 <a:solidFill>
                   <a:srgbClr val="1A1A2E"/>
                 </a:solidFill>
                 <a:latin typeface="Calibri"/>
               </a:rPr>
-              <a:t>▸ may tank closer to LLM rate than rational-agent rate</a:t>
+              <a:t>▸ Results assume playoff value &gt; lottery EV  (V = 200)</a:t>
+            </a:r>
+          </a:p>
+          <a:p>
+            <a:pPr>
+              <a:spcBef>
+                <a:spcPts val="800"/>
+              </a:spcBef>
+            </a:pPr>
+            <a:r>
+              <a:rPr sz="1700" b="0">
+                <a:solidFill>
+                  <a:srgbClr val="1A1A2E"/>
+                </a:solidFill>
+                <a:latin typeface="Calibri"/>
+              </a:rPr>
+              <a:t>▸ Generational draft year: lottery EV spikes → could flip even</a:t>
+            </a:r>
+          </a:p>
+          <a:p>
+            <a:pPr>
+              <a:spcBef>
+                <a:spcPts val="800"/>
+              </a:spcBef>
+            </a:pPr>
+            <a:r>
+              <a:rPr sz="1700" b="0">
+                <a:solidFill>
+                  <a:srgbClr val="1A1A2E"/>
+                </a:solidFill>
+                <a:latin typeface="Calibri"/>
+              </a:rPr>
+              <a:t>▸ COLA and 3-2-1 from near-zero to meaningful tanking</a:t>
             </a:r>
           </a:p>
         </p:txBody>
@@ -20717,7 +20696,7 @@
                 </a:solidFill>
                 <a:latin typeface="Calibri"/>
               </a:rPr>
-              <a:t>▸ 4. LLM agents tank nearly 2× more than rational agents</a:t>
+              <a:t>▸ 4. LLM tanking is mechanism-dependent  (0% → 8% range)</a:t>
             </a:r>
           </a:p>
           <a:p>
@@ -20733,7 +20712,7 @@
                 </a:solidFill>
                 <a:latin typeface="Calibri"/>
               </a:rPr>
-              <a:t>  – Qualitative elimination heuristics are sharper than gradient EU</a:t>
+              <a:t>  – COLA and 3-2-1: near-zero; Bilevel and NBA lottery: higher</a:t>
             </a:r>
           </a:p>
           <a:p>
@@ -20749,7 +20728,7 @@
                 </a:solidFill>
                 <a:latin typeface="Calibri"/>
               </a:rPr>
-              <a:t>  – Behavioral realism matters for mechanism design predictions</a:t>
+              <a:t>  – Type 2 behavioral tanking (post-elimination effort drop) dominates</a:t>
             </a:r>
           </a:p>
           <a:p>
@@ -20902,7 +20881,7 @@
                 </a:solidFill>
                 <a:latin typeface="Calibri"/>
               </a:rPr>
-              <a:t>▸ Draft class strength</a:t>
+              <a:t>▸ Draft class strength  (links to LLM results)</a:t>
             </a:r>
           </a:p>
           <a:p>
@@ -20918,7 +20897,7 @@
                 </a:solidFill>
                 <a:latin typeface="Calibri"/>
               </a:rPr>
-              <a:t>▸ We hold D(k) fixed across seasons</a:t>
+              <a:t>▸ We hold D(k) fixed; playoff value dominates throughout</a:t>
             </a:r>
           </a:p>
           <a:p>
@@ -20934,7 +20913,7 @@
                 </a:solidFill>
                 <a:latin typeface="Calibri"/>
               </a:rPr>
-              <a:t>▸ In a 'generational draft year', D(1) &gt;&gt; 100 pts</a:t>
+              <a:t>▸ Generational draft year: D(1) spike could flip COLA / 3-2-1</a:t>
             </a:r>
           </a:p>
           <a:p>
@@ -20950,77 +20929,7 @@
                 </a:solidFill>
                 <a:latin typeface="Calibri"/>
               </a:rPr>
-              <a:t>▸ Would mechanisms hold under variable draft quality?</a:t>
-            </a:r>
-          </a:p>
-          <a:p>
-            <a:r>
-              <a:rPr sz="700"/>
-              <a:t> </a:t>
-            </a:r>
-          </a:p>
-          <a:p>
-            <a:pPr>
-              <a:spcBef>
-                <a:spcPts val="500"/>
-              </a:spcBef>
-            </a:pPr>
-            <a:r>
-              <a:rPr sz="1500" b="1">
-                <a:solidFill>
-                  <a:srgbClr val="1A1A2E"/>
-                </a:solidFill>
-                <a:latin typeface="Calibri"/>
-              </a:rPr>
-              <a:t>▸ Full 30-team LLM simulation</a:t>
-            </a:r>
-          </a:p>
-          <a:p>
-            <a:pPr>
-              <a:spcBef>
-                <a:spcPts val="500"/>
-              </a:spcBef>
-            </a:pPr>
-            <a:r>
-              <a:rPr sz="1500" b="0">
-                <a:solidFill>
-                  <a:srgbClr val="1A1A2E"/>
-                </a:solidFill>
-                <a:latin typeface="Calibri"/>
-              </a:rPr>
-              <a:t>▸ We ran 10 seasons, 1 mechanism</a:t>
-            </a:r>
-          </a:p>
-          <a:p>
-            <a:pPr>
-              <a:spcBef>
-                <a:spcPts val="500"/>
-              </a:spcBef>
-            </a:pPr>
-            <a:r>
-              <a:rPr sz="1500" b="0">
-                <a:solidFill>
-                  <a:srgbClr val="1A1A2E"/>
-                </a:solidFill>
-                <a:latin typeface="Calibri"/>
-              </a:rPr>
-              <a:t>▸ Full 50-season sweep across all mechanisms:</a:t>
-            </a:r>
-          </a:p>
-          <a:p>
-            <a:pPr>
-              <a:spcBef>
-                <a:spcPts val="500"/>
-              </a:spcBef>
-            </a:pPr>
-            <a:r>
-              <a:rPr sz="1500" b="0">
-                <a:solidFill>
-                  <a:srgbClr val="1A1A2E"/>
-                </a:solidFill>
-                <a:latin typeface="Calibri"/>
-              </a:rPr>
-              <a:t>▸ Do LLMs discover mechanism-specific strategies?</a:t>
+              <a:t>▸ Anti-tanking guarantees may not hold in unusually strong draft years</a:t>
             </a:r>
           </a:p>
           <a:p>
@@ -21533,7 +21442,7 @@
                 </a:solidFill>
                 <a:latin typeface="Calibri"/>
               </a:rPr>
-              <a:t>2×</a:t>
+              <a:t>0% → 8%</a:t>
             </a:r>
           </a:p>
         </p:txBody>
@@ -21566,8 +21475,8 @@
                 </a:solidFill>
                 <a:latin typeface="Calibri"/>
               </a:rPr>
-              <a:t>LLM tanks more
-than rational</a:t>
+              <a:t>LLM tanking range
+across mechanisms</a:t>
             </a:r>
           </a:p>
         </p:txBody>
